--- a/Store Support/Projects/TDA Insights/TDA_WK8_Report_PPTX_TEST.pptx
+++ b/Store Support/Projects/TDA Insights/TDA_WK8_Report_PPTX_TEST.pptx
@@ -26,7 +26,6 @@
     <p:sldId id="274" r:id="rId25"/>
     <p:sldId id="275" r:id="rId26"/>
     <p:sldId id="276" r:id="rId27"/>
-    <p:sldId id="277" r:id="rId28"/>
   </p:sldIdLst>
   <p:sldSz cx="9144000" cy="6858000" type="screen4x3"/>
   <p:notesSz cx="6858000" cy="9144000"/>
@@ -3351,7 +3350,7 @@
         <p:spPr>
           <a:xfrm>
             <a:off x="0" y="0"/>
-            <a:ext cx="9144000" cy="5547554"/>
+            <a:ext cx="9144000" cy="3882802"/>
           </a:xfrm>
           <a:prstGeom prst="rect">
             <a:avLst/>
@@ -3393,7 +3392,7 @@
         <p:spPr>
           <a:xfrm>
             <a:off x="0" y="0"/>
-            <a:ext cx="9144000" cy="4154598"/>
+            <a:ext cx="9144000" cy="5105885"/>
           </a:xfrm>
           <a:prstGeom prst="rect">
             <a:avLst/>
@@ -3477,7 +3476,7 @@
         <p:spPr>
           <a:xfrm>
             <a:off x="0" y="0"/>
-            <a:ext cx="9144000" cy="3237286"/>
+            <a:ext cx="9144000" cy="5071910"/>
           </a:xfrm>
           <a:prstGeom prst="rect">
             <a:avLst/>
@@ -3561,7 +3560,7 @@
         <p:spPr>
           <a:xfrm>
             <a:off x="0" y="0"/>
-            <a:ext cx="9144000" cy="1407515"/>
+            <a:ext cx="9144000" cy="6858000"/>
           </a:xfrm>
           <a:prstGeom prst="rect">
             <a:avLst/>
@@ -3603,7 +3602,7 @@
         <p:spPr>
           <a:xfrm>
             <a:off x="0" y="0"/>
-            <a:ext cx="9144000" cy="6858000"/>
+            <a:ext cx="9144000" cy="6770636"/>
           </a:xfrm>
           <a:prstGeom prst="rect">
             <a:avLst/>
@@ -3645,7 +3644,7 @@
         <p:spPr>
           <a:xfrm>
             <a:off x="0" y="0"/>
-            <a:ext cx="9144000" cy="6770636"/>
+            <a:ext cx="9144000" cy="4766140"/>
           </a:xfrm>
           <a:prstGeom prst="rect">
             <a:avLst/>
@@ -3687,7 +3686,7 @@
         <p:spPr>
           <a:xfrm>
             <a:off x="0" y="0"/>
-            <a:ext cx="9144000" cy="4766140"/>
+            <a:ext cx="9144000" cy="6396917"/>
           </a:xfrm>
           <a:prstGeom prst="rect">
             <a:avLst/>
@@ -3771,7 +3770,7 @@
         <p:spPr>
           <a:xfrm>
             <a:off x="0" y="0"/>
-            <a:ext cx="9144000" cy="6858000"/>
+            <a:ext cx="9144000" cy="6430891"/>
           </a:xfrm>
           <a:prstGeom prst="rect">
             <a:avLst/>
@@ -3813,49 +3812,7 @@
         <p:spPr>
           <a:xfrm>
             <a:off x="0" y="0"/>
-            <a:ext cx="9144000" cy="1776382"/>
-          </a:xfrm>
-          <a:prstGeom prst="rect">
-            <a:avLst/>
-          </a:prstGeom>
-        </p:spPr>
-      </p:pic>
-    </p:spTree>
-  </p:cSld>
-  <p:clrMapOvr>
-    <a:masterClrMapping/>
-  </p:clrMapOvr>
-</p:sld>
-</file>
-
-<file path=ppt/slides/slide22.xml><?xml version="1.0" encoding="utf-8"?>
-<p:sld xmlns:a="http://schemas.openxmlformats.org/drawingml/2006/main" xmlns:p="http://schemas.openxmlformats.org/presentationml/2006/main" xmlns:r="http://schemas.openxmlformats.org/officeDocument/2006/relationships">
-  <p:cSld>
-    <p:spTree>
-      <p:nvGrpSpPr>
-        <p:cNvPr id="1" name=""/>
-        <p:cNvGrpSpPr/>
-        <p:nvPr/>
-      </p:nvGrpSpPr>
-      <p:grpSpPr/>
-      <p:pic>
-        <p:nvPicPr>
-          <p:cNvPr id="2" name="Picture 1" descr="image.jpg"/>
-          <p:cNvPicPr>
-            <a:picLocks noChangeAspect="1"/>
-          </p:cNvPicPr>
-          <p:nvPr/>
-        </p:nvPicPr>
-        <p:blipFill>
-          <a:blip r:embed="rId2"/>
-          <a:stretch>
-            <a:fillRect/>
-          </a:stretch>
-        </p:blipFill>
-        <p:spPr>
-          <a:xfrm>
-            <a:off x="0" y="0"/>
-            <a:ext cx="9144000" cy="6566789"/>
+            <a:ext cx="9144000" cy="1407515"/>
           </a:xfrm>
           <a:prstGeom prst="rect">
             <a:avLst/>
@@ -3897,7 +3854,7 @@
         <p:spPr>
           <a:xfrm>
             <a:off x="0" y="0"/>
-            <a:ext cx="9144000" cy="6736662"/>
+            <a:ext cx="9144000" cy="6858000"/>
           </a:xfrm>
           <a:prstGeom prst="rect">
             <a:avLst/>
@@ -3939,7 +3896,7 @@
         <p:spPr>
           <a:xfrm>
             <a:off x="0" y="0"/>
-            <a:ext cx="9144000" cy="6858000"/>
+            <a:ext cx="9144000" cy="6057171"/>
           </a:xfrm>
           <a:prstGeom prst="rect">
             <a:avLst/>
@@ -3981,7 +3938,7 @@
         <p:spPr>
           <a:xfrm>
             <a:off x="0" y="0"/>
-            <a:ext cx="9144000" cy="5343707"/>
+            <a:ext cx="9144000" cy="6858000"/>
           </a:xfrm>
           <a:prstGeom prst="rect">
             <a:avLst/>
